--- a/Sprite_Edit_Session.pptx
+++ b/Sprite_Edit_Session.pptx
@@ -9,6 +9,7 @@
     <p:sldId id="257" r:id="rId3"/>
     <p:sldId id="258" r:id="rId4"/>
     <p:sldId id="259" r:id="rId5"/>
+    <p:sldId id="260" r:id="rId6"/>
   </p:sldIdLst>
   <p:sldSz cx="12192000" cy="6858000"/>
   <p:notesSz cx="6858000" cy="9144000"/>
@@ -246,7 +247,7 @@
           <a:p>
             <a:fld id="{2337EF1C-BD3F-43CE-85FE-80E5198D7BBB}" type="datetimeFigureOut">
               <a:rPr lang="ko-KR" altLang="en-US" smtClean="0"/>
-              <a:t>2026-05-04</a:t>
+              <a:t>2026-10-02</a:t>
             </a:fld>
             <a:endParaRPr lang="ko-KR" altLang="en-US"/>
           </a:p>
@@ -416,7 +417,7 @@
           <a:p>
             <a:fld id="{2337EF1C-BD3F-43CE-85FE-80E5198D7BBB}" type="datetimeFigureOut">
               <a:rPr lang="ko-KR" altLang="en-US" smtClean="0"/>
-              <a:t>2026-05-04</a:t>
+              <a:t>2026-10-02</a:t>
             </a:fld>
             <a:endParaRPr lang="ko-KR" altLang="en-US"/>
           </a:p>
@@ -596,7 +597,7 @@
           <a:p>
             <a:fld id="{2337EF1C-BD3F-43CE-85FE-80E5198D7BBB}" type="datetimeFigureOut">
               <a:rPr lang="ko-KR" altLang="en-US" smtClean="0"/>
-              <a:t>2026-05-04</a:t>
+              <a:t>2026-10-02</a:t>
             </a:fld>
             <a:endParaRPr lang="ko-KR" altLang="en-US"/>
           </a:p>
@@ -766,7 +767,7 @@
           <a:p>
             <a:fld id="{2337EF1C-BD3F-43CE-85FE-80E5198D7BBB}" type="datetimeFigureOut">
               <a:rPr lang="ko-KR" altLang="en-US" smtClean="0"/>
-              <a:t>2026-05-04</a:t>
+              <a:t>2026-10-02</a:t>
             </a:fld>
             <a:endParaRPr lang="ko-KR" altLang="en-US"/>
           </a:p>
@@ -1012,7 +1013,7 @@
           <a:p>
             <a:fld id="{2337EF1C-BD3F-43CE-85FE-80E5198D7BBB}" type="datetimeFigureOut">
               <a:rPr lang="ko-KR" altLang="en-US" smtClean="0"/>
-              <a:t>2026-05-04</a:t>
+              <a:t>2026-10-02</a:t>
             </a:fld>
             <a:endParaRPr lang="ko-KR" altLang="en-US"/>
           </a:p>
@@ -1244,7 +1245,7 @@
           <a:p>
             <a:fld id="{2337EF1C-BD3F-43CE-85FE-80E5198D7BBB}" type="datetimeFigureOut">
               <a:rPr lang="ko-KR" altLang="en-US" smtClean="0"/>
-              <a:t>2026-05-04</a:t>
+              <a:t>2026-10-02</a:t>
             </a:fld>
             <a:endParaRPr lang="ko-KR" altLang="en-US"/>
           </a:p>
@@ -1611,7 +1612,7 @@
           <a:p>
             <a:fld id="{2337EF1C-BD3F-43CE-85FE-80E5198D7BBB}" type="datetimeFigureOut">
               <a:rPr lang="ko-KR" altLang="en-US" smtClean="0"/>
-              <a:t>2026-05-04</a:t>
+              <a:t>2026-10-02</a:t>
             </a:fld>
             <a:endParaRPr lang="ko-KR" altLang="en-US"/>
           </a:p>
@@ -1729,7 +1730,7 @@
           <a:p>
             <a:fld id="{2337EF1C-BD3F-43CE-85FE-80E5198D7BBB}" type="datetimeFigureOut">
               <a:rPr lang="ko-KR" altLang="en-US" smtClean="0"/>
-              <a:t>2026-05-04</a:t>
+              <a:t>2026-10-02</a:t>
             </a:fld>
             <a:endParaRPr lang="ko-KR" altLang="en-US"/>
           </a:p>
@@ -1824,7 +1825,7 @@
           <a:p>
             <a:fld id="{2337EF1C-BD3F-43CE-85FE-80E5198D7BBB}" type="datetimeFigureOut">
               <a:rPr lang="ko-KR" altLang="en-US" smtClean="0"/>
-              <a:t>2026-05-04</a:t>
+              <a:t>2026-10-02</a:t>
             </a:fld>
             <a:endParaRPr lang="ko-KR" altLang="en-US"/>
           </a:p>
@@ -2101,7 +2102,7 @@
           <a:p>
             <a:fld id="{2337EF1C-BD3F-43CE-85FE-80E5198D7BBB}" type="datetimeFigureOut">
               <a:rPr lang="ko-KR" altLang="en-US" smtClean="0"/>
-              <a:t>2026-05-04</a:t>
+              <a:t>2026-10-02</a:t>
             </a:fld>
             <a:endParaRPr lang="ko-KR" altLang="en-US"/>
           </a:p>
@@ -2354,7 +2355,7 @@
           <a:p>
             <a:fld id="{2337EF1C-BD3F-43CE-85FE-80E5198D7BBB}" type="datetimeFigureOut">
               <a:rPr lang="ko-KR" altLang="en-US" smtClean="0"/>
-              <a:t>2026-05-04</a:t>
+              <a:t>2026-10-02</a:t>
             </a:fld>
             <a:endParaRPr lang="ko-KR" altLang="en-US"/>
           </a:p>
@@ -2567,7 +2568,7 @@
           <a:p>
             <a:fld id="{2337EF1C-BD3F-43CE-85FE-80E5198D7BBB}" type="datetimeFigureOut">
               <a:rPr lang="ko-KR" altLang="en-US" smtClean="0"/>
-              <a:t>2026-05-04</a:t>
+              <a:t>2026-10-02</a:t>
             </a:fld>
             <a:endParaRPr lang="ko-KR" altLang="en-US"/>
           </a:p>
@@ -3702,6 +3703,91 @@
 </p:sld>
 </file>
 
+<file path=ppt/slides/slide5.xml><?xml version="1.0" encoding="utf-8"?>
+<p:sld xmlns:a="http://schemas.openxmlformats.org/drawingml/2006/main" xmlns:r="http://schemas.openxmlformats.org/officeDocument/2006/relationships" xmlns:p="http://schemas.openxmlformats.org/presentationml/2006/main">
+  <p:cSld>
+    <p:spTree>
+      <p:nvGrpSpPr>
+        <p:cNvPr id="1" name=""/>
+        <p:cNvGrpSpPr/>
+        <p:nvPr/>
+      </p:nvGrpSpPr>
+      <p:grpSpPr>
+        <a:xfrm>
+          <a:off x="0" y="0"/>
+          <a:ext cx="0" cy="0"/>
+          <a:chOff x="0" y="0"/>
+          <a:chExt cx="0" cy="0"/>
+        </a:xfrm>
+      </p:grpSpPr>
+      <p:sp>
+        <p:nvSpPr>
+          <p:cNvPr id="2" name="타원 1"/>
+          <p:cNvSpPr/>
+          <p:nvPr/>
+        </p:nvSpPr>
+        <p:spPr>
+          <a:xfrm>
+            <a:off x="710212" y="532663"/>
+            <a:ext cx="2160000" cy="2160000"/>
+          </a:xfrm>
+          <a:prstGeom prst="ellipse">
+            <a:avLst/>
+          </a:prstGeom>
+          <a:solidFill>
+            <a:srgbClr val="FFFF00"/>
+          </a:solidFill>
+          <a:ln w="76200">
+            <a:solidFill>
+              <a:schemeClr val="tx1"/>
+            </a:solidFill>
+          </a:ln>
+        </p:spPr>
+        <p:style>
+          <a:lnRef idx="2">
+            <a:schemeClr val="accent1">
+              <a:shade val="50000"/>
+            </a:schemeClr>
+          </a:lnRef>
+          <a:fillRef idx="1">
+            <a:schemeClr val="accent1"/>
+          </a:fillRef>
+          <a:effectRef idx="0">
+            <a:schemeClr val="accent1"/>
+          </a:effectRef>
+          <a:fontRef idx="minor">
+            <a:schemeClr val="lt1"/>
+          </a:fontRef>
+        </p:style>
+        <p:txBody>
+          <a:bodyPr rtlCol="0" anchor="ctr"/>
+          <a:lstStyle/>
+          <a:p>
+            <a:pPr algn="ctr"/>
+            <a:endParaRPr lang="ko-KR" altLang="en-US"/>
+          </a:p>
+        </p:txBody>
+      </p:sp>
+    </p:spTree>
+    <p:extLst>
+      <p:ext uri="{BB962C8B-B14F-4D97-AF65-F5344CB8AC3E}">
+        <p14:creationId xmlns:p14="http://schemas.microsoft.com/office/powerpoint/2010/main" val="522726965"/>
+      </p:ext>
+    </p:extLst>
+  </p:cSld>
+  <p:clrMapOvr>
+    <a:masterClrMapping/>
+  </p:clrMapOvr>
+  <p:timing>
+    <p:tnLst>
+      <p:par>
+        <p:cTn id="1" dur="indefinite" restart="never" nodeType="tmRoot"/>
+      </p:par>
+    </p:tnLst>
+  </p:timing>
+</p:sld>
+</file>
+
 <file path=ppt/theme/theme1.xml><?xml version="1.0" encoding="utf-8"?>
 <a:theme xmlns:a="http://schemas.openxmlformats.org/drawingml/2006/main" name="Office 테마">
   <a:themeElements>
@@ -3953,7 +4039,42 @@
       </a:bgFillStyleLst>
     </a:fmtScheme>
   </a:themeElements>
-  <a:objectDefaults/>
+  <a:objectDefaults>
+    <a:spDef>
+      <a:spPr>
+        <a:solidFill>
+          <a:srgbClr val="FFFF00"/>
+        </a:solidFill>
+        <a:ln w="76200">
+          <a:solidFill>
+            <a:schemeClr val="tx1"/>
+          </a:solidFill>
+        </a:ln>
+      </a:spPr>
+      <a:bodyPr rtlCol="0" anchor="ctr"/>
+      <a:lstStyle>
+        <a:defPPr algn="ctr">
+          <a:defRPr/>
+        </a:defPPr>
+      </a:lstStyle>
+      <a:style>
+        <a:lnRef idx="2">
+          <a:schemeClr val="accent1">
+            <a:shade val="50000"/>
+          </a:schemeClr>
+        </a:lnRef>
+        <a:fillRef idx="1">
+          <a:schemeClr val="accent1"/>
+        </a:fillRef>
+        <a:effectRef idx="0">
+          <a:schemeClr val="accent1"/>
+        </a:effectRef>
+        <a:fontRef idx="minor">
+          <a:schemeClr val="lt1"/>
+        </a:fontRef>
+      </a:style>
+    </a:spDef>
+  </a:objectDefaults>
   <a:extraClrSchemeLst/>
   <a:extLst>
     <a:ext uri="{05A4C25C-085E-4340-85A3-A5531E510DB2}">
